--- a/lectures/b08/ppt/b08-l01.pptx
+++ b/lectures/b08/ppt/b08-l01.pptx
@@ -5133,7 +5133,7 @@
                           <a:ea typeface="Malgun Gothic"/>
                           <a:cs typeface="Malgun Gothic"/>
                         </a:rPr>
-                        <a:t>다발성 경화증, NMOSD, MOGAD, ADEM (B08 L03, L08)</a:t>
+                        <a:t>다발성 경화증, NMOSD, MOGAD, ADEM (B08 L03, L04)</a:t>
                       </a:r>
                     </a:p>
                   </a:txBody>
@@ -5183,7 +5183,7 @@
                           <a:ea typeface="Malgun Gothic"/>
                           <a:cs typeface="Malgun Gothic"/>
                         </a:rPr>
-                        <a:t>NMDAR·LGI1·CASPR2·GABA_B 뇌염 (B08 L10)</a:t>
+                        <a:t>NMDAR·LGI1·CASPR2·GABA_B 뇌염 (B08 L06)</a:t>
                       </a:r>
                     </a:p>
                   </a:txBody>
@@ -5283,7 +5283,7 @@
                           <a:ea typeface="Malgun Gothic"/>
                           <a:cs typeface="Malgun Gothic"/>
                         </a:rPr>
-                        <a:t>중증 근무력증, 램버트-이튼, 길랭-바레·CIDP, MMN (B08 L09)</a:t>
+                        <a:t>중증 근무력증, 램버트-이튼, 길랭-바레·CIDP, MMN (B08 L05)</a:t>
                       </a:r>
                     </a:p>
                   </a:txBody>
